--- a/test-corpus/word-verification/ishikawa.pptx
+++ b/test-corpus/word-verification/ishikawa.pptx
@@ -144,8 +144,8 @@
         </p:nvSpPr>
         <p:spPr>
           <a:xfrm>
-            <a:off x="768844" y="4428933"/>
-            <a:ext cx="8940273" cy="1"/>
+            <a:off x="651598" y="4160246"/>
+            <a:ext cx="5576798" cy="1"/>
           </a:xfrm>
           <a:custGeom>
             <a:avLst/>
@@ -154,18 +154,18 @@
             <a:cxnLst/>
             <a:rect l="0" t="0" r="0" b="0"/>
             <a:pathLst>
-              <a:path w="6557962" h="1" fill="none">
+              <a:path w="5576798" h="1" fill="none">
                 <a:moveTo>
                   <a:pt x="0" y="0"/>
                 </a:moveTo>
                 <a:lnTo>
-                  <a:pt x="6557962" y="0"/>
+                  <a:pt x="5576798" y="0"/>
                 </a:lnTo>
               </a:path>
             </a:pathLst>
           </a:custGeom>
           <a:noFill/>
-          <a:ln w="51941">
+          <a:ln w="32400">
             <a:solidFill>
               <a:srgbClr val="404040"/>
             </a:solidFill>
@@ -180,8 +180,8 @@
         </p:nvSpPr>
         <p:spPr>
           <a:xfrm>
-            <a:off x="9709117" y="4065349"/>
-            <a:ext cx="1714039" cy="727168"/>
+            <a:off x="6228396" y="3933448"/>
+            <a:ext cx="1069190" cy="453596"/>
           </a:xfrm>
           <a:prstGeom prst="rect">
             <a:avLst/>
@@ -206,7 +206,7 @@
               </a:spcAft>
             </a:pPr>
             <a:r>
-              <a:rPr lang="en-US" b="1" sz="1636" dirty="0">
+              <a:rPr lang="en-US" b="1" sz="1000" dirty="0">
                 <a:solidFill>
                   <a:srgbClr val="FFFFFF"/>
                 </a:solidFill>
@@ -224,8 +224,8 @@
         </p:nvSpPr>
         <p:spPr>
           <a:xfrm>
-            <a:off x="4063175" y="2143547"/>
-            <a:ext cx="936230" cy="2285386"/>
+            <a:off x="2706549" y="2734659"/>
+            <a:ext cx="584005" cy="1425587"/>
           </a:xfrm>
           <a:custGeom>
             <a:avLst/>
@@ -234,18 +234,18 @@
             <a:cxnLst/>
             <a:rect l="0" t="0" r="0" b="0"/>
             <a:pathLst>
-              <a:path w="686753" h="1676400" fill="none">
+              <a:path w="584005" h="1425587" fill="none">
                 <a:moveTo>
                   <a:pt x="0" y="0"/>
                 </a:moveTo>
                 <a:lnTo>
-                  <a:pt x="686753" y="1676400"/>
+                  <a:pt x="584005" y="1425587"/>
                 </a:lnTo>
               </a:path>
             </a:pathLst>
           </a:custGeom>
           <a:noFill/>
-          <a:ln w="30299">
+          <a:ln w="18900">
             <a:solidFill>
               <a:srgbClr val="4472C4"/>
             </a:solidFill>
@@ -260,8 +260,8 @@
         </p:nvSpPr>
         <p:spPr>
           <a:xfrm>
-            <a:off x="3543769" y="1753993"/>
-            <a:ext cx="1038812" cy="389554"/>
+            <a:off x="2382552" y="2491661"/>
+            <a:ext cx="647994" cy="242998"/>
           </a:xfrm>
           <a:prstGeom prst="rect">
             <a:avLst/>
@@ -286,7 +286,7 @@
               </a:spcAft>
             </a:pPr>
             <a:r>
-              <a:rPr lang="en-US" b="1" sz="1500" dirty="0">
+              <a:rPr lang="en-US" b="1" sz="950" dirty="0">
                 <a:solidFill>
                   <a:srgbClr val="FFFFFF"/>
                 </a:solidFill>
@@ -304,8 +304,8 @@
         </p:nvSpPr>
         <p:spPr>
           <a:xfrm>
-            <a:off x="2693324" y="2143547"/>
-            <a:ext cx="1324485" cy="285673"/>
+            <a:off x="1852058" y="2734659"/>
+            <a:ext cx="826192" cy="178198"/>
           </a:xfrm>
           <a:prstGeom prst="rect">
             <a:avLst/>
@@ -316,7 +316,7 @@
           </a:ln>
         </p:spPr>
         <p:txBody>
-          <a:bodyPr wrap="none" lIns="25970" tIns="0" rIns="25970" bIns="0" anchor="ctr"/>
+          <a:bodyPr wrap="none" lIns="16200" tIns="0" rIns="16200" bIns="0" anchor="ctr"/>
           <a:lstStyle/>
           <a:p>
             <a:pPr algn="r">
@@ -328,7 +328,7 @@
               </a:spcAft>
             </a:pPr>
             <a:r>
-              <a:rPr lang="en-US" sz="1500" dirty="0">
+              <a:rPr lang="en-US" sz="950" dirty="0">
                 <a:solidFill>
                   <a:srgbClr val="000000"/>
                 </a:solidFill>
@@ -346,8 +346,8 @@
         </p:nvSpPr>
         <p:spPr>
           <a:xfrm>
-            <a:off x="4017809" y="2286384"/>
-            <a:ext cx="103881" cy="1"/>
+            <a:off x="2678250" y="2823758"/>
+            <a:ext cx="64799" cy="1"/>
           </a:xfrm>
           <a:custGeom>
             <a:avLst/>
@@ -356,18 +356,18 @@
             <a:cxnLst/>
             <a:rect l="0" t="0" r="0" b="0"/>
             <a:pathLst>
-              <a:path w="76200" h="1" fill="none">
+              <a:path w="64799" h="1" fill="none">
                 <a:moveTo>
                   <a:pt x="0" y="0"/>
                 </a:moveTo>
                 <a:lnTo>
-                  <a:pt x="76200" y="0"/>
+                  <a:pt x="64799" y="0"/>
                 </a:lnTo>
               </a:path>
             </a:pathLst>
           </a:custGeom>
           <a:noFill/>
-          <a:ln w="12985">
+          <a:ln w="8100">
             <a:solidFill>
               <a:srgbClr val="85A3D9"/>
             </a:solidFill>
@@ -382,8 +382,8 @@
         </p:nvSpPr>
         <p:spPr>
           <a:xfrm>
-            <a:off x="1849452" y="2429220"/>
-            <a:ext cx="2285386" cy="285673"/>
+            <a:off x="1325664" y="2912857"/>
+            <a:ext cx="1425587" cy="178198"/>
           </a:xfrm>
           <a:prstGeom prst="rect">
             <a:avLst/>
@@ -394,7 +394,7 @@
           </a:ln>
         </p:spPr>
         <p:txBody>
-          <a:bodyPr wrap="none" lIns="25970" tIns="0" rIns="25970" bIns="0" anchor="ctr"/>
+          <a:bodyPr wrap="none" lIns="16200" tIns="0" rIns="16200" bIns="0" anchor="ctr"/>
           <a:lstStyle/>
           <a:p>
             <a:pPr algn="r">
@@ -406,7 +406,7 @@
               </a:spcAft>
             </a:pPr>
             <a:r>
-              <a:rPr lang="en-US" sz="1500" dirty="0">
+              <a:rPr lang="en-US" sz="950" dirty="0">
                 <a:solidFill>
                   <a:srgbClr val="000000"/>
                 </a:solidFill>
@@ -424,8 +424,8 @@
         </p:nvSpPr>
         <p:spPr>
           <a:xfrm>
-            <a:off x="4134838" y="2572057"/>
-            <a:ext cx="103881" cy="1"/>
+            <a:off x="2751250" y="3001956"/>
+            <a:ext cx="64800" cy="1"/>
           </a:xfrm>
           <a:custGeom>
             <a:avLst/>
@@ -434,18 +434,18 @@
             <a:cxnLst/>
             <a:rect l="0" t="0" r="0" b="0"/>
             <a:pathLst>
-              <a:path w="76200" h="1" fill="none">
+              <a:path w="64800" h="1" fill="none">
                 <a:moveTo>
                   <a:pt x="0" y="0"/>
                 </a:moveTo>
                 <a:lnTo>
-                  <a:pt x="76200" y="0"/>
+                  <a:pt x="64800" y="0"/>
                 </a:lnTo>
               </a:path>
             </a:pathLst>
           </a:custGeom>
           <a:noFill/>
-          <a:ln w="12985">
+          <a:ln w="8100">
             <a:solidFill>
               <a:srgbClr val="85A3D9"/>
             </a:solidFill>
@@ -460,8 +460,8 @@
         </p:nvSpPr>
         <p:spPr>
           <a:xfrm>
-            <a:off x="1460060" y="2714894"/>
-            <a:ext cx="2791807" cy="285673"/>
+            <a:off x="1082767" y="3091056"/>
+            <a:ext cx="1741484" cy="178198"/>
           </a:xfrm>
           <a:prstGeom prst="rect">
             <a:avLst/>
@@ -472,7 +472,7 @@
           </a:ln>
         </p:spPr>
         <p:txBody>
-          <a:bodyPr wrap="none" lIns="25970" tIns="0" rIns="25970" bIns="0" anchor="ctr"/>
+          <a:bodyPr wrap="none" lIns="16200" tIns="0" rIns="16200" bIns="0" anchor="ctr"/>
           <a:lstStyle/>
           <a:p>
             <a:pPr algn="r">
@@ -484,7 +484,7 @@
               </a:spcAft>
             </a:pPr>
             <a:r>
-              <a:rPr lang="en-US" sz="1500" dirty="0">
+              <a:rPr lang="en-US" sz="950" dirty="0">
                 <a:solidFill>
                   <a:srgbClr val="000000"/>
                 </a:solidFill>
@@ -502,8 +502,8 @@
         </p:nvSpPr>
         <p:spPr>
           <a:xfrm>
-            <a:off x="4251866" y="2857730"/>
-            <a:ext cx="103881" cy="1"/>
+            <a:off x="2824251" y="3180155"/>
+            <a:ext cx="64799" cy="1"/>
           </a:xfrm>
           <a:custGeom>
             <a:avLst/>
@@ -512,18 +512,18 @@
             <a:cxnLst/>
             <a:rect l="0" t="0" r="0" b="0"/>
             <a:pathLst>
-              <a:path w="76200" h="1" fill="none">
+              <a:path w="64799" h="1" fill="none">
                 <a:moveTo>
                   <a:pt x="0" y="0"/>
                 </a:moveTo>
                 <a:lnTo>
-                  <a:pt x="76200" y="0"/>
+                  <a:pt x="64799" y="0"/>
                 </a:lnTo>
               </a:path>
             </a:pathLst>
           </a:custGeom>
           <a:noFill/>
-          <a:ln w="12985">
+          <a:ln w="8100">
             <a:solidFill>
               <a:srgbClr val="85A3D9"/>
             </a:solidFill>
@@ -538,8 +538,8 @@
         </p:nvSpPr>
         <p:spPr>
           <a:xfrm>
-            <a:off x="1330370" y="3000567"/>
-            <a:ext cx="3038525" cy="285673"/>
+            <a:off x="1001869" y="3269254"/>
+            <a:ext cx="1895382" cy="178198"/>
           </a:xfrm>
           <a:prstGeom prst="rect">
             <a:avLst/>
@@ -550,7 +550,7 @@
           </a:ln>
         </p:spPr>
         <p:txBody>
-          <a:bodyPr wrap="none" lIns="25970" tIns="0" rIns="25970" bIns="0" anchor="ctr"/>
+          <a:bodyPr wrap="none" lIns="16200" tIns="0" rIns="16200" bIns="0" anchor="ctr"/>
           <a:lstStyle/>
           <a:p>
             <a:pPr algn="r">
@@ -562,7 +562,7 @@
               </a:spcAft>
             </a:pPr>
             <a:r>
-              <a:rPr lang="en-US" sz="1500" dirty="0">
+              <a:rPr lang="en-US" sz="950" dirty="0">
                 <a:solidFill>
                   <a:srgbClr val="000000"/>
                 </a:solidFill>
@@ -580,8 +580,8 @@
         </p:nvSpPr>
         <p:spPr>
           <a:xfrm>
-            <a:off x="4368895" y="3143404"/>
-            <a:ext cx="103881" cy="1"/>
+            <a:off x="2897252" y="3358353"/>
+            <a:ext cx="64799" cy="1"/>
           </a:xfrm>
           <a:custGeom>
             <a:avLst/>
@@ -590,18 +590,18 @@
             <a:cxnLst/>
             <a:rect l="0" t="0" r="0" b="0"/>
             <a:pathLst>
-              <a:path w="76200" h="1" fill="none">
+              <a:path w="64799" h="1" fill="none">
                 <a:moveTo>
                   <a:pt x="0" y="0"/>
                 </a:moveTo>
                 <a:lnTo>
-                  <a:pt x="76200" y="0"/>
+                  <a:pt x="64799" y="0"/>
                 </a:lnTo>
               </a:path>
             </a:pathLst>
           </a:custGeom>
           <a:noFill/>
-          <a:ln w="12985">
+          <a:ln w="8100">
             <a:solidFill>
               <a:srgbClr val="85A3D9"/>
             </a:solidFill>
@@ -616,8 +616,8 @@
         </p:nvSpPr>
         <p:spPr>
           <a:xfrm>
-            <a:off x="4563104" y="4428933"/>
-            <a:ext cx="436301" cy="857020"/>
+            <a:off x="3018396" y="4160246"/>
+            <a:ext cx="272158" cy="534595"/>
           </a:xfrm>
           <a:custGeom>
             <a:avLst/>
@@ -626,18 +626,18 @@
             <a:cxnLst/>
             <a:rect l="0" t="0" r="0" b="0"/>
             <a:pathLst>
-              <a:path w="320040" h="628650" fill="none">
+              <a:path w="272158" h="534595" fill="none">
                 <a:moveTo>
-                  <a:pt x="0" y="628650"/>
+                  <a:pt x="0" y="534595"/>
                 </a:moveTo>
                 <a:lnTo>
-                  <a:pt x="320040" y="0"/>
+                  <a:pt x="272158" y="0"/>
                 </a:lnTo>
               </a:path>
             </a:pathLst>
           </a:custGeom>
           <a:noFill/>
-          <a:ln w="30299">
+          <a:ln w="18900">
             <a:solidFill>
               <a:srgbClr val="ED7D31"/>
             </a:solidFill>
@@ -652,8 +652,8 @@
         </p:nvSpPr>
         <p:spPr>
           <a:xfrm>
-            <a:off x="4193026" y="5285953"/>
-            <a:ext cx="740153" cy="389554"/>
+            <a:off x="2787548" y="4694841"/>
+            <a:ext cx="461696" cy="242998"/>
           </a:xfrm>
           <a:prstGeom prst="rect">
             <a:avLst/>
@@ -678,7 +678,7 @@
               </a:spcAft>
             </a:pPr>
             <a:r>
-              <a:rPr lang="en-US" b="1" sz="1500" dirty="0">
+              <a:rPr lang="en-US" b="1" sz="950" dirty="0">
                 <a:solidFill>
                   <a:srgbClr val="FFFFFF"/>
                 </a:solidFill>
@@ -696,8 +696,8 @@
         </p:nvSpPr>
         <p:spPr>
           <a:xfrm>
-            <a:off x="3259395" y="5000280"/>
-            <a:ext cx="1272544" cy="285673"/>
+            <a:off x="2205164" y="4516642"/>
+            <a:ext cx="793793" cy="178198"/>
           </a:xfrm>
           <a:prstGeom prst="rect">
             <a:avLst/>
@@ -708,7 +708,7 @@
           </a:ln>
         </p:spPr>
         <p:txBody>
-          <a:bodyPr wrap="none" lIns="25970" tIns="0" rIns="25970" bIns="0" anchor="ctr"/>
+          <a:bodyPr wrap="none" lIns="16200" tIns="0" rIns="16200" bIns="0" anchor="ctr"/>
           <a:lstStyle/>
           <a:p>
             <a:pPr algn="r">
@@ -720,7 +720,7 @@
               </a:spcAft>
             </a:pPr>
             <a:r>
-              <a:rPr lang="en-US" sz="1500" dirty="0">
+              <a:rPr lang="en-US" sz="950" dirty="0">
                 <a:solidFill>
                   <a:srgbClr val="000000"/>
                 </a:solidFill>
@@ -738,8 +738,8 @@
         </p:nvSpPr>
         <p:spPr>
           <a:xfrm>
-            <a:off x="4531939" y="5143116"/>
-            <a:ext cx="103881" cy="1"/>
+            <a:off x="2998956" y="4605741"/>
+            <a:ext cx="64800" cy="1"/>
           </a:xfrm>
           <a:custGeom>
             <a:avLst/>
@@ -748,18 +748,18 @@
             <a:cxnLst/>
             <a:rect l="0" t="0" r="0" b="0"/>
             <a:pathLst>
-              <a:path w="76200" h="1" fill="none">
+              <a:path w="64800" h="1" fill="none">
                 <a:moveTo>
                   <a:pt x="0" y="0"/>
                 </a:moveTo>
                 <a:lnTo>
-                  <a:pt x="76200" y="0"/>
+                  <a:pt x="64800" y="0"/>
                 </a:lnTo>
               </a:path>
             </a:pathLst>
           </a:custGeom>
           <a:noFill/>
-          <a:ln w="12985">
+          <a:ln w="8100">
             <a:solidFill>
               <a:srgbClr val="F3AB79"/>
             </a:solidFill>
@@ -774,8 +774,8 @@
         </p:nvSpPr>
         <p:spPr>
           <a:xfrm>
-            <a:off x="8045720" y="2143547"/>
-            <a:ext cx="936228" cy="2285386"/>
+            <a:off x="5190796" y="2734659"/>
+            <a:ext cx="584004" cy="1425587"/>
           </a:xfrm>
           <a:custGeom>
             <a:avLst/>
@@ -784,18 +784,18 @@
             <a:cxnLst/>
             <a:rect l="0" t="0" r="0" b="0"/>
             <a:pathLst>
-              <a:path w="686752" h="1676400" fill="none">
+              <a:path w="584004" h="1425587" fill="none">
                 <a:moveTo>
                   <a:pt x="0" y="0"/>
                 </a:moveTo>
                 <a:lnTo>
-                  <a:pt x="686752" y="1676400"/>
+                  <a:pt x="584004" y="1425587"/>
                 </a:lnTo>
               </a:path>
             </a:pathLst>
           </a:custGeom>
           <a:noFill/>
-          <a:ln w="30299">
+          <a:ln w="18900">
             <a:solidFill>
               <a:srgbClr val="70AD47"/>
             </a:solidFill>
@@ -810,8 +810,8 @@
         </p:nvSpPr>
         <p:spPr>
           <a:xfrm>
-            <a:off x="7422433" y="1753993"/>
-            <a:ext cx="1246574" cy="389554"/>
+            <a:off x="4801999" y="2491661"/>
+            <a:ext cx="777593" cy="242998"/>
           </a:xfrm>
           <a:prstGeom prst="rect">
             <a:avLst/>
@@ -836,7 +836,7 @@
               </a:spcAft>
             </a:pPr>
             <a:r>
-              <a:rPr lang="en-US" b="1" sz="1500" dirty="0">
+              <a:rPr lang="en-US" b="1" sz="950" dirty="0">
                 <a:solidFill>
                   <a:srgbClr val="FFFFFF"/>
                 </a:solidFill>
@@ -854,8 +854,8 @@
         </p:nvSpPr>
         <p:spPr>
           <a:xfrm>
-            <a:off x="7338111" y="2143547"/>
-            <a:ext cx="662243" cy="285673"/>
+            <a:off x="4749401" y="2734659"/>
+            <a:ext cx="413096" cy="178198"/>
           </a:xfrm>
           <a:prstGeom prst="rect">
             <a:avLst/>
@@ -866,7 +866,7 @@
           </a:ln>
         </p:spPr>
         <p:txBody>
-          <a:bodyPr wrap="none" lIns="25970" tIns="0" rIns="25970" bIns="0" anchor="ctr"/>
+          <a:bodyPr wrap="none" lIns="16200" tIns="0" rIns="16200" bIns="0" anchor="ctr"/>
           <a:lstStyle/>
           <a:p>
             <a:pPr algn="r">
@@ -878,7 +878,7 @@
               </a:spcAft>
             </a:pPr>
             <a:r>
-              <a:rPr lang="en-US" sz="1500" dirty="0">
+              <a:rPr lang="en-US" sz="950" dirty="0">
                 <a:solidFill>
                   <a:srgbClr val="000000"/>
                 </a:solidFill>
@@ -896,8 +896,8 @@
         </p:nvSpPr>
         <p:spPr>
           <a:xfrm>
-            <a:off x="8000353" y="2286384"/>
-            <a:ext cx="103881" cy="1"/>
+            <a:off x="5162497" y="2823758"/>
+            <a:ext cx="64799" cy="1"/>
           </a:xfrm>
           <a:custGeom>
             <a:avLst/>
@@ -906,18 +906,18 @@
             <a:cxnLst/>
             <a:rect l="0" t="0" r="0" b="0"/>
             <a:pathLst>
-              <a:path w="76200" h="1" fill="none">
+              <a:path w="64799" h="1" fill="none">
                 <a:moveTo>
                   <a:pt x="0" y="0"/>
                 </a:moveTo>
                 <a:lnTo>
-                  <a:pt x="76200" y="0"/>
+                  <a:pt x="64799" y="0"/>
                 </a:lnTo>
               </a:path>
             </a:pathLst>
           </a:custGeom>
           <a:noFill/>
-          <a:ln w="12985">
+          <a:ln w="8100">
             <a:solidFill>
               <a:srgbClr val="A2CA87"/>
             </a:solidFill>
@@ -932,8 +932,8 @@
         </p:nvSpPr>
         <p:spPr>
           <a:xfrm>
-            <a:off x="5961847" y="2429220"/>
-            <a:ext cx="1973742" cy="285673"/>
+            <a:off x="3890910" y="2912857"/>
+            <a:ext cx="1231189" cy="178198"/>
           </a:xfrm>
           <a:prstGeom prst="rect">
             <a:avLst/>
@@ -944,7 +944,7 @@
           </a:ln>
         </p:spPr>
         <p:txBody>
-          <a:bodyPr wrap="none" lIns="25970" tIns="0" rIns="25970" bIns="0" anchor="ctr"/>
+          <a:bodyPr wrap="none" lIns="16200" tIns="0" rIns="16200" bIns="0" anchor="ctr"/>
           <a:lstStyle/>
           <a:p>
             <a:pPr algn="r">
@@ -956,7 +956,7 @@
               </a:spcAft>
             </a:pPr>
             <a:r>
-              <a:rPr lang="en-US" i="1" sz="1500" dirty="0">
+              <a:rPr lang="en-US" i="1" sz="950" dirty="0">
                 <a:solidFill>
                   <a:srgbClr val="595959"/>
                 </a:solidFill>
@@ -974,8 +974,8 @@
         </p:nvSpPr>
         <p:spPr>
           <a:xfrm>
-            <a:off x="7935590" y="2572057"/>
-            <a:ext cx="285673" cy="1"/>
+            <a:off x="5122098" y="3001956"/>
+            <a:ext cx="178199" cy="1"/>
           </a:xfrm>
           <a:custGeom>
             <a:avLst/>
@@ -984,18 +984,18 @@
             <a:cxnLst/>
             <a:rect l="0" t="0" r="0" b="0"/>
             <a:pathLst>
-              <a:path w="209550" h="1" fill="none">
+              <a:path w="178199" h="1" fill="none">
                 <a:moveTo>
                   <a:pt x="0" y="0"/>
                 </a:moveTo>
                 <a:lnTo>
-                  <a:pt x="209550" y="0"/>
+                  <a:pt x="178199" y="0"/>
                 </a:lnTo>
               </a:path>
             </a:pathLst>
           </a:custGeom>
           <a:noFill/>
-          <a:ln w="12985">
+          <a:ln w="8100">
             <a:solidFill>
               <a:srgbClr val="A2CA87"/>
             </a:solidFill>
@@ -1010,8 +1010,8 @@
         </p:nvSpPr>
         <p:spPr>
           <a:xfrm>
-            <a:off x="6689178" y="2714894"/>
-            <a:ext cx="1363440" cy="285673"/>
+            <a:off x="4344607" y="3091056"/>
+            <a:ext cx="850492" cy="178198"/>
           </a:xfrm>
           <a:prstGeom prst="rect">
             <a:avLst/>
@@ -1022,7 +1022,7 @@
           </a:ln>
         </p:spPr>
         <p:txBody>
-          <a:bodyPr wrap="none" lIns="25970" tIns="0" rIns="25970" bIns="0" anchor="ctr"/>
+          <a:bodyPr wrap="none" lIns="16200" tIns="0" rIns="16200" bIns="0" anchor="ctr"/>
           <a:lstStyle/>
           <a:p>
             <a:pPr algn="r">
@@ -1034,7 +1034,7 @@
               </a:spcAft>
             </a:pPr>
             <a:r>
-              <a:rPr lang="en-US" i="1" sz="1500" dirty="0">
+              <a:rPr lang="en-US" i="1" sz="950" dirty="0">
                 <a:solidFill>
                   <a:srgbClr val="595959"/>
                 </a:solidFill>
@@ -1052,8 +1052,8 @@
         </p:nvSpPr>
         <p:spPr>
           <a:xfrm>
-            <a:off x="8052618" y="2857730"/>
-            <a:ext cx="285673" cy="1"/>
+            <a:off x="5195099" y="3180155"/>
+            <a:ext cx="178198" cy="1"/>
           </a:xfrm>
           <a:custGeom>
             <a:avLst/>
@@ -1062,18 +1062,18 @@
             <a:cxnLst/>
             <a:rect l="0" t="0" r="0" b="0"/>
             <a:pathLst>
-              <a:path w="209550" h="1" fill="none">
+              <a:path w="178198" h="1" fill="none">
                 <a:moveTo>
                   <a:pt x="0" y="0"/>
                 </a:moveTo>
                 <a:lnTo>
-                  <a:pt x="209550" y="0"/>
+                  <a:pt x="178198" y="0"/>
                 </a:lnTo>
               </a:path>
             </a:pathLst>
           </a:custGeom>
           <a:noFill/>
-          <a:ln w="12985">
+          <a:ln w="8100">
             <a:solidFill>
               <a:srgbClr val="A2CA87"/>
             </a:solidFill>
@@ -1088,8 +1088,8 @@
         </p:nvSpPr>
         <p:spPr>
           <a:xfrm>
-            <a:off x="7000984" y="3000567"/>
-            <a:ext cx="1168663" cy="285673"/>
+            <a:off x="4539106" y="3269254"/>
+            <a:ext cx="728993" cy="178198"/>
           </a:xfrm>
           <a:prstGeom prst="rect">
             <a:avLst/>
@@ -1100,7 +1100,7 @@
           </a:ln>
         </p:spPr>
         <p:txBody>
-          <a:bodyPr wrap="none" lIns="25970" tIns="0" rIns="25970" bIns="0" anchor="ctr"/>
+          <a:bodyPr wrap="none" lIns="16200" tIns="0" rIns="16200" bIns="0" anchor="ctr"/>
           <a:lstStyle/>
           <a:p>
             <a:pPr algn="r">
@@ -1112,7 +1112,7 @@
               </a:spcAft>
             </a:pPr>
             <a:r>
-              <a:rPr lang="en-US" i="1" sz="1500" dirty="0">
+              <a:rPr lang="en-US" i="1" sz="950" dirty="0">
                 <a:solidFill>
                   <a:srgbClr val="595959"/>
                 </a:solidFill>
@@ -1130,8 +1130,8 @@
         </p:nvSpPr>
         <p:spPr>
           <a:xfrm>
-            <a:off x="8169647" y="3143404"/>
-            <a:ext cx="285673" cy="1"/>
+            <a:off x="5268100" y="3358353"/>
+            <a:ext cx="178198" cy="1"/>
           </a:xfrm>
           <a:custGeom>
             <a:avLst/>
@@ -1140,18 +1140,18 @@
             <a:cxnLst/>
             <a:rect l="0" t="0" r="0" b="0"/>
             <a:pathLst>
-              <a:path w="209550" h="1" fill="none">
+              <a:path w="178198" h="1" fill="none">
                 <a:moveTo>
                   <a:pt x="0" y="0"/>
                 </a:moveTo>
                 <a:lnTo>
-                  <a:pt x="209550" y="0"/>
+                  <a:pt x="178198" y="0"/>
                 </a:lnTo>
               </a:path>
             </a:pathLst>
           </a:custGeom>
           <a:noFill/>
-          <a:ln w="12985">
+          <a:ln w="8100">
             <a:solidFill>
               <a:srgbClr val="A2CA87"/>
             </a:solidFill>
@@ -1166,8 +1166,8 @@
         </p:nvSpPr>
         <p:spPr>
           <a:xfrm>
-            <a:off x="7572492" y="3286240"/>
-            <a:ext cx="895975" cy="285673"/>
+            <a:off x="4895604" y="3447452"/>
+            <a:ext cx="558895" cy="178198"/>
           </a:xfrm>
           <a:prstGeom prst="rect">
             <a:avLst/>
@@ -1178,7 +1178,7 @@
           </a:ln>
         </p:spPr>
         <p:txBody>
-          <a:bodyPr wrap="none" lIns="25970" tIns="0" rIns="25970" bIns="0" anchor="ctr"/>
+          <a:bodyPr wrap="none" lIns="16200" tIns="0" rIns="16200" bIns="0" anchor="ctr"/>
           <a:lstStyle/>
           <a:p>
             <a:pPr algn="r">
@@ -1190,7 +1190,7 @@
               </a:spcAft>
             </a:pPr>
             <a:r>
-              <a:rPr lang="en-US" sz="1500" dirty="0">
+              <a:rPr lang="en-US" sz="950" dirty="0">
                 <a:solidFill>
                   <a:srgbClr val="000000"/>
                 </a:solidFill>
@@ -1208,8 +1208,8 @@
         </p:nvSpPr>
         <p:spPr>
           <a:xfrm>
-            <a:off x="8468468" y="3429077"/>
-            <a:ext cx="103881" cy="1"/>
+            <a:off x="5454499" y="3536551"/>
+            <a:ext cx="64799" cy="1"/>
           </a:xfrm>
           <a:custGeom>
             <a:avLst/>
@@ -1218,18 +1218,18 @@
             <a:cxnLst/>
             <a:rect l="0" t="0" r="0" b="0"/>
             <a:pathLst>
-              <a:path w="76200" h="1" fill="none">
+              <a:path w="64799" h="1" fill="none">
                 <a:moveTo>
                   <a:pt x="0" y="0"/>
                 </a:moveTo>
                 <a:lnTo>
-                  <a:pt x="76200" y="0"/>
+                  <a:pt x="64799" y="0"/>
                 </a:lnTo>
               </a:path>
             </a:pathLst>
           </a:custGeom>
           <a:noFill/>
-          <a:ln w="12985">
+          <a:ln w="8100">
             <a:solidFill>
               <a:srgbClr val="A2CA87"/>
             </a:solidFill>
@@ -1244,8 +1244,8 @@
         </p:nvSpPr>
         <p:spPr>
           <a:xfrm>
-            <a:off x="6832501" y="3571913"/>
-            <a:ext cx="1571203" cy="285673"/>
+            <a:off x="4434010" y="3625651"/>
+            <a:ext cx="980091" cy="178198"/>
           </a:xfrm>
           <a:prstGeom prst="rect">
             <a:avLst/>
@@ -1256,7 +1256,7 @@
           </a:ln>
         </p:spPr>
         <p:txBody>
-          <a:bodyPr wrap="none" lIns="25970" tIns="0" rIns="25970" bIns="0" anchor="ctr"/>
+          <a:bodyPr wrap="none" lIns="16200" tIns="0" rIns="16200" bIns="0" anchor="ctr"/>
           <a:lstStyle/>
           <a:p>
             <a:pPr algn="r">
@@ -1268,7 +1268,7 @@
               </a:spcAft>
             </a:pPr>
             <a:r>
-              <a:rPr lang="en-US" i="1" sz="1500" dirty="0">
+              <a:rPr lang="en-US" i="1" sz="950" dirty="0">
                 <a:solidFill>
                   <a:srgbClr val="595959"/>
                 </a:solidFill>
@@ -1286,8 +1286,8 @@
         </p:nvSpPr>
         <p:spPr>
           <a:xfrm>
-            <a:off x="8403704" y="3714750"/>
-            <a:ext cx="285673" cy="1"/>
+            <a:off x="5414101" y="3714750"/>
+            <a:ext cx="178198" cy="1"/>
           </a:xfrm>
           <a:custGeom>
             <a:avLst/>
@@ -1296,18 +1296,18 @@
             <a:cxnLst/>
             <a:rect l="0" t="0" r="0" b="0"/>
             <a:pathLst>
-              <a:path w="209550" h="1" fill="none">
+              <a:path w="178198" h="1" fill="none">
                 <a:moveTo>
                   <a:pt x="0" y="0"/>
                 </a:moveTo>
                 <a:lnTo>
-                  <a:pt x="209550" y="0"/>
+                  <a:pt x="178198" y="0"/>
                 </a:lnTo>
               </a:path>
             </a:pathLst>
           </a:custGeom>
           <a:noFill/>
-          <a:ln w="12985">
+          <a:ln w="8100">
             <a:solidFill>
               <a:srgbClr val="A2CA87"/>
             </a:solidFill>
@@ -1322,8 +1322,8 @@
         </p:nvSpPr>
         <p:spPr>
           <a:xfrm>
-            <a:off x="7157292" y="3857587"/>
-            <a:ext cx="1363440" cy="285673"/>
+            <a:off x="4636609" y="3803849"/>
+            <a:ext cx="850492" cy="178198"/>
           </a:xfrm>
           <a:prstGeom prst="rect">
             <a:avLst/>
@@ -1334,7 +1334,7 @@
           </a:ln>
         </p:spPr>
         <p:txBody>
-          <a:bodyPr wrap="none" lIns="25970" tIns="0" rIns="25970" bIns="0" anchor="ctr"/>
+          <a:bodyPr wrap="none" lIns="16200" tIns="0" rIns="16200" bIns="0" anchor="ctr"/>
           <a:lstStyle/>
           <a:p>
             <a:pPr algn="r">
@@ -1346,7 +1346,7 @@
               </a:spcAft>
             </a:pPr>
             <a:r>
-              <a:rPr lang="en-US" i="1" sz="1500" dirty="0">
+              <a:rPr lang="en-US" i="1" sz="950" dirty="0">
                 <a:solidFill>
                   <a:srgbClr val="595959"/>
                 </a:solidFill>
@@ -1364,8 +1364,8 @@
         </p:nvSpPr>
         <p:spPr>
           <a:xfrm>
-            <a:off x="8520733" y="4000423"/>
-            <a:ext cx="285673" cy="1"/>
+            <a:off x="5487101" y="3892948"/>
+            <a:ext cx="178199" cy="1"/>
           </a:xfrm>
           <a:custGeom>
             <a:avLst/>
@@ -1374,18 +1374,18 @@
             <a:cxnLst/>
             <a:rect l="0" t="0" r="0" b="0"/>
             <a:pathLst>
-              <a:path w="209550" h="1" fill="none">
+              <a:path w="178199" h="1" fill="none">
                 <a:moveTo>
                   <a:pt x="0" y="0"/>
                 </a:moveTo>
                 <a:lnTo>
-                  <a:pt x="209550" y="0"/>
+                  <a:pt x="178199" y="0"/>
                 </a:lnTo>
               </a:path>
             </a:pathLst>
           </a:custGeom>
           <a:noFill/>
-          <a:ln w="12985">
+          <a:ln w="8100">
             <a:solidFill>
               <a:srgbClr val="A2CA87"/>
             </a:solidFill>
@@ -1400,8 +1400,8 @@
         </p:nvSpPr>
         <p:spPr>
           <a:xfrm>
-            <a:off x="8545648" y="4428933"/>
-            <a:ext cx="436301" cy="857020"/>
+            <a:off x="5502643" y="4160246"/>
+            <a:ext cx="272157" cy="534595"/>
           </a:xfrm>
           <a:custGeom>
             <a:avLst/>
@@ -1410,18 +1410,18 @@
             <a:cxnLst/>
             <a:rect l="0" t="0" r="0" b="0"/>
             <a:pathLst>
-              <a:path w="320040" h="628650" fill="none">
+              <a:path w="272157" h="534595" fill="none">
                 <a:moveTo>
-                  <a:pt x="0" y="628650"/>
+                  <a:pt x="0" y="534595"/>
                 </a:moveTo>
                 <a:lnTo>
-                  <a:pt x="320040" y="0"/>
+                  <a:pt x="272157" y="0"/>
                 </a:lnTo>
               </a:path>
             </a:pathLst>
           </a:custGeom>
           <a:noFill/>
-          <a:ln w="30299">
+          <a:ln w="18900">
             <a:solidFill>
               <a:srgbClr val="FFC000"/>
             </a:solidFill>
@@ -1436,8 +1436,8 @@
         </p:nvSpPr>
         <p:spPr>
           <a:xfrm>
-            <a:off x="7818479" y="5285953"/>
-            <a:ext cx="1454337" cy="389554"/>
+            <a:off x="5049047" y="4694841"/>
+            <a:ext cx="907192" cy="242998"/>
           </a:xfrm>
           <a:prstGeom prst="rect">
             <a:avLst/>
@@ -1462,7 +1462,7 @@
               </a:spcAft>
             </a:pPr>
             <a:r>
-              <a:rPr lang="en-US" b="1" sz="1500" dirty="0">
+              <a:rPr lang="en-US" b="1" sz="950" dirty="0">
                 <a:solidFill>
                   <a:srgbClr val="FFFFFF"/>
                 </a:solidFill>
@@ -1480,8 +1480,8 @@
         </p:nvSpPr>
         <p:spPr>
           <a:xfrm>
-            <a:off x="5930439" y="5000280"/>
-            <a:ext cx="2584044" cy="285673"/>
+            <a:off x="3871318" y="4516642"/>
+            <a:ext cx="1611885" cy="178198"/>
           </a:xfrm>
           <a:prstGeom prst="rect">
             <a:avLst/>
@@ -1492,7 +1492,7 @@
           </a:ln>
         </p:spPr>
         <p:txBody>
-          <a:bodyPr wrap="none" lIns="25970" tIns="0" rIns="25970" bIns="0" anchor="ctr"/>
+          <a:bodyPr wrap="none" lIns="16200" tIns="0" rIns="16200" bIns="0" anchor="ctr"/>
           <a:lstStyle/>
           <a:p>
             <a:pPr algn="r">
@@ -1504,7 +1504,7 @@
               </a:spcAft>
             </a:pPr>
             <a:r>
-              <a:rPr lang="en-US" sz="1500" dirty="0">
+              <a:rPr lang="en-US" sz="950" dirty="0">
                 <a:solidFill>
                   <a:srgbClr val="000000"/>
                 </a:solidFill>
@@ -1522,8 +1522,8 @@
         </p:nvSpPr>
         <p:spPr>
           <a:xfrm>
-            <a:off x="8514483" y="5143116"/>
-            <a:ext cx="103881" cy="1"/>
+            <a:off x="5483203" y="4605741"/>
+            <a:ext cx="64800" cy="1"/>
           </a:xfrm>
           <a:custGeom>
             <a:avLst/>
@@ -1532,18 +1532,18 @@
             <a:cxnLst/>
             <a:rect l="0" t="0" r="0" b="0"/>
             <a:pathLst>
-              <a:path w="76200" h="1" fill="none">
+              <a:path w="64800" h="1" fill="none">
                 <a:moveTo>
                   <a:pt x="0" y="0"/>
                 </a:moveTo>
                 <a:lnTo>
-                  <a:pt x="76200" y="0"/>
+                  <a:pt x="64800" y="0"/>
                 </a:lnTo>
               </a:path>
             </a:pathLst>
           </a:custGeom>
           <a:noFill/>
-          <a:ln w="12985">
+          <a:ln w="8100">
             <a:solidFill>
               <a:srgbClr val="FFD659"/>
             </a:solidFill>
@@ -1558,8 +1558,8 @@
         </p:nvSpPr>
         <p:spPr>
           <a:xfrm>
-            <a:off x="7699016" y="4714606"/>
-            <a:ext cx="960901" cy="285673"/>
+            <a:off x="4974528" y="4338444"/>
+            <a:ext cx="599394" cy="178198"/>
           </a:xfrm>
           <a:prstGeom prst="rect">
             <a:avLst/>
@@ -1570,7 +1570,7 @@
           </a:ln>
         </p:spPr>
         <p:txBody>
-          <a:bodyPr wrap="none" lIns="25970" tIns="0" rIns="25970" bIns="0" anchor="ctr"/>
+          <a:bodyPr wrap="none" lIns="16200" tIns="0" rIns="16200" bIns="0" anchor="ctr"/>
           <a:lstStyle/>
           <a:p>
             <a:pPr algn="r">
@@ -1582,7 +1582,7 @@
               </a:spcAft>
             </a:pPr>
             <a:r>
-              <a:rPr lang="en-US" sz="1500" dirty="0">
+              <a:rPr lang="en-US" sz="950" dirty="0">
                 <a:solidFill>
                   <a:srgbClr val="000000"/>
                 </a:solidFill>
@@ -1600,8 +1600,8 @@
         </p:nvSpPr>
         <p:spPr>
           <a:xfrm>
-            <a:off x="8659917" y="4857443"/>
-            <a:ext cx="103881" cy="1"/>
+            <a:off x="5573922" y="4427543"/>
+            <a:ext cx="64800" cy="1"/>
           </a:xfrm>
           <a:custGeom>
             <a:avLst/>
@@ -1610,23 +1610,313 @@
             <a:cxnLst/>
             <a:rect l="0" t="0" r="0" b="0"/>
             <a:pathLst>
-              <a:path w="76200" h="1" fill="none">
+              <a:path w="64800" h="1" fill="none">
                 <a:moveTo>
                   <a:pt x="0" y="0"/>
                 </a:moveTo>
                 <a:lnTo>
-                  <a:pt x="76200" y="0"/>
+                  <a:pt x="64800" y="0"/>
                 </a:lnTo>
               </a:path>
             </a:pathLst>
           </a:custGeom>
           <a:noFill/>
-          <a:ln w="12985">
+          <a:ln w="8100">
             <a:solidFill>
               <a:srgbClr val="FFD659"/>
             </a:solidFill>
           </a:ln>
         </p:spPr>
+      </p:sp>
+      <p:sp>
+        <p:nvSpPr>
+          <p:cNvPr id="4" name="Mermaid source"/>
+          <p:cNvSpPr/>
+          <p:nvPr/>
+        </p:nvSpPr>
+        <p:spPr>
+          <a:xfrm>
+            <a:off x="7674864" y="1028700"/>
+            <a:ext cx="4059936" cy="5372100"/>
+          </a:xfrm>
+          <a:prstGeom prst="rect">
+            <a:avLst/>
+          </a:prstGeom>
+          <a:solidFill>
+            <a:srgbClr val="F3F4F6"/>
+          </a:solidFill>
+          <a:ln w="9525">
+            <a:solidFill>
+              <a:srgbClr val="D1D5DB"/>
+            </a:solidFill>
+          </a:ln>
+        </p:spPr>
+        <p:txBody>
+          <a:bodyPr wrap="square" lIns="91440" tIns="45720" rIns="91440" bIns="45720" anchor="t">
+            <a:noAutofit/>
+          </a:bodyPr>
+          <a:lstStyle/>
+          <a:p>
+            <a:pPr algn="l"/>
+            <a:r>
+              <a:rPr lang="en-US" sz="1400" dirty="0">
+                <a:solidFill>
+                  <a:srgbClr val="1F2937"/>
+                </a:solidFill>
+                <a:latin typeface="Consolas"/>
+                <a:cs typeface="Consolas"/>
+              </a:rPr>
+              <a:t>ishikawa-beta</a:t>
+            </a:r>
+          </a:p>
+          <a:p>
+            <a:pPr algn="l"/>
+            <a:r>
+              <a:rPr lang="en-US" sz="1400" dirty="0">
+                <a:solidFill>
+                  <a:srgbClr val="1F2937"/>
+                </a:solidFill>
+                <a:latin typeface="Consolas"/>
+                <a:cs typeface="Consolas"/>
+              </a:rPr>
+              <a:t>    Blurry Photo</a:t>
+            </a:r>
+          </a:p>
+          <a:p>
+            <a:pPr algn="l"/>
+            <a:r>
+              <a:rPr lang="en-US" sz="1400" dirty="0">
+                <a:solidFill>
+                  <a:srgbClr val="1F2937"/>
+                </a:solidFill>
+                <a:latin typeface="Consolas"/>
+                <a:cs typeface="Consolas"/>
+              </a:rPr>
+              <a:t>    Process</a:t>
+            </a:r>
+          </a:p>
+          <a:p>
+            <a:pPr algn="l"/>
+            <a:r>
+              <a:rPr lang="en-US" sz="1400" dirty="0">
+                <a:solidFill>
+                  <a:srgbClr val="1F2937"/>
+                </a:solidFill>
+                <a:latin typeface="Consolas"/>
+                <a:cs typeface="Consolas"/>
+              </a:rPr>
+              <a:t>        Out of focus</a:t>
+            </a:r>
+          </a:p>
+          <a:p>
+            <a:pPr algn="l"/>
+            <a:r>
+              <a:rPr lang="en-US" sz="1400" dirty="0">
+                <a:solidFill>
+                  <a:srgbClr val="1F2937"/>
+                </a:solidFill>
+                <a:latin typeface="Consolas"/>
+                <a:cs typeface="Consolas"/>
+              </a:rPr>
+              <a:t>        Shutter speed too slow</a:t>
+            </a:r>
+          </a:p>
+          <a:p>
+            <a:pPr algn="l"/>
+            <a:r>
+              <a:rPr lang="en-US" sz="1400" dirty="0">
+                <a:solidFill>
+                  <a:srgbClr val="1F2937"/>
+                </a:solidFill>
+                <a:latin typeface="Consolas"/>
+                <a:cs typeface="Consolas"/>
+              </a:rPr>
+              <a:t>        Protective film not removed</a:t>
+            </a:r>
+          </a:p>
+          <a:p>
+            <a:pPr algn="l"/>
+            <a:r>
+              <a:rPr lang="en-US" sz="1400" dirty="0">
+                <a:solidFill>
+                  <a:srgbClr val="1F2937"/>
+                </a:solidFill>
+                <a:latin typeface="Consolas"/>
+                <a:cs typeface="Consolas"/>
+              </a:rPr>
+              <a:t>        Beautification filter applied</a:t>
+            </a:r>
+          </a:p>
+          <a:p>
+            <a:pPr algn="l"/>
+            <a:r>
+              <a:rPr lang="en-US" sz="1400" dirty="0">
+                <a:solidFill>
+                  <a:srgbClr val="1F2937"/>
+                </a:solidFill>
+                <a:latin typeface="Consolas"/>
+                <a:cs typeface="Consolas"/>
+              </a:rPr>
+              <a:t>    User</a:t>
+            </a:r>
+          </a:p>
+          <a:p>
+            <a:pPr algn="l"/>
+            <a:r>
+              <a:rPr lang="en-US" sz="1400" dirty="0">
+                <a:solidFill>
+                  <a:srgbClr val="1F2937"/>
+                </a:solidFill>
+                <a:latin typeface="Consolas"/>
+                <a:cs typeface="Consolas"/>
+              </a:rPr>
+              <a:t>        Shaky hands</a:t>
+            </a:r>
+          </a:p>
+          <a:p>
+            <a:pPr algn="l"/>
+            <a:r>
+              <a:rPr lang="en-US" sz="1400" dirty="0">
+                <a:solidFill>
+                  <a:srgbClr val="1F2937"/>
+                </a:solidFill>
+                <a:latin typeface="Consolas"/>
+                <a:cs typeface="Consolas"/>
+              </a:rPr>
+              <a:t>    Equipment</a:t>
+            </a:r>
+          </a:p>
+          <a:p>
+            <a:pPr algn="l"/>
+            <a:r>
+              <a:rPr lang="en-US" sz="1400" dirty="0">
+                <a:solidFill>
+                  <a:srgbClr val="1F2937"/>
+                </a:solidFill>
+                <a:latin typeface="Consolas"/>
+                <a:cs typeface="Consolas"/>
+              </a:rPr>
+              <a:t>        LENS</a:t>
+            </a:r>
+          </a:p>
+          <a:p>
+            <a:pPr algn="l"/>
+            <a:r>
+              <a:rPr lang="en-US" sz="1400" dirty="0">
+                <a:solidFill>
+                  <a:srgbClr val="1F2937"/>
+                </a:solidFill>
+                <a:latin typeface="Consolas"/>
+                <a:cs typeface="Consolas"/>
+              </a:rPr>
+              <a:t>            Inappropriate lens</a:t>
+            </a:r>
+          </a:p>
+          <a:p>
+            <a:pPr algn="l"/>
+            <a:r>
+              <a:rPr lang="en-US" sz="1400" dirty="0">
+                <a:solidFill>
+                  <a:srgbClr val="1F2937"/>
+                </a:solidFill>
+                <a:latin typeface="Consolas"/>
+                <a:cs typeface="Consolas"/>
+              </a:rPr>
+              <a:t>            Damaged lens</a:t>
+            </a:r>
+          </a:p>
+          <a:p>
+            <a:pPr algn="l"/>
+            <a:r>
+              <a:rPr lang="en-US" sz="1400" dirty="0">
+                <a:solidFill>
+                  <a:srgbClr val="1F2937"/>
+                </a:solidFill>
+                <a:latin typeface="Consolas"/>
+                <a:cs typeface="Consolas"/>
+              </a:rPr>
+              <a:t>            Dirty lens</a:t>
+            </a:r>
+          </a:p>
+          <a:p>
+            <a:pPr algn="l"/>
+            <a:r>
+              <a:rPr lang="en-US" sz="1400" dirty="0">
+                <a:solidFill>
+                  <a:srgbClr val="1F2937"/>
+                </a:solidFill>
+                <a:latin typeface="Consolas"/>
+                <a:cs typeface="Consolas"/>
+              </a:rPr>
+              <a:t>        SENSOR</a:t>
+            </a:r>
+          </a:p>
+          <a:p>
+            <a:pPr algn="l"/>
+            <a:r>
+              <a:rPr lang="en-US" sz="1400" dirty="0">
+                <a:solidFill>
+                  <a:srgbClr val="1F2937"/>
+                </a:solidFill>
+                <a:latin typeface="Consolas"/>
+                <a:cs typeface="Consolas"/>
+              </a:rPr>
+              <a:t>            Damaged sensor</a:t>
+            </a:r>
+          </a:p>
+          <a:p>
+            <a:pPr algn="l"/>
+            <a:r>
+              <a:rPr lang="en-US" sz="1400" dirty="0">
+                <a:solidFill>
+                  <a:srgbClr val="1F2937"/>
+                </a:solidFill>
+                <a:latin typeface="Consolas"/>
+                <a:cs typeface="Consolas"/>
+              </a:rPr>
+              <a:t>            Dirty sensor</a:t>
+            </a:r>
+          </a:p>
+          <a:p>
+            <a:pPr algn="l"/>
+            <a:r>
+              <a:rPr lang="en-US" sz="1400" dirty="0">
+                <a:solidFill>
+                  <a:srgbClr val="1F2937"/>
+                </a:solidFill>
+                <a:latin typeface="Consolas"/>
+                <a:cs typeface="Consolas"/>
+              </a:rPr>
+              <a:t>    Environment</a:t>
+            </a:r>
+          </a:p>
+          <a:p>
+            <a:pPr algn="l"/>
+            <a:r>
+              <a:rPr lang="en-US" sz="1400" dirty="0">
+                <a:solidFill>
+                  <a:srgbClr val="1F2937"/>
+                </a:solidFill>
+                <a:latin typeface="Consolas"/>
+                <a:cs typeface="Consolas"/>
+              </a:rPr>
+              <a:t>        Subject moved too quickly</a:t>
+            </a:r>
+          </a:p>
+          <a:p>
+            <a:pPr algn="l"/>
+            <a:r>
+              <a:rPr lang="en-US" sz="1400" dirty="0">
+                <a:solidFill>
+                  <a:srgbClr val="1F2937"/>
+                </a:solidFill>
+                <a:latin typeface="Consolas"/>
+                <a:cs typeface="Consolas"/>
+              </a:rPr>
+              <a:t>        Too dark</a:t>
+            </a:r>
+          </a:p>
+        </p:txBody>
       </p:sp>
     </p:spTree>
   </p:cSld>
